--- a/Daten-WG/2026/DAX Entwurfsmuster/DAX Entwurfsmuster.pptx
+++ b/Daten-WG/2026/DAX Entwurfsmuster/DAX Entwurfsmuster.pptx
@@ -118,6 +118,11 @@
       </a:defRPr>
     </a:lvl9pPr>
   </p:defaultTextStyle>
+  <p:extLst>
+    <p:ext uri="{EFAFB233-063F-42B5-8137-9DF3F51BA10A}">
+      <p15:sldGuideLst xmlns:p15="http://schemas.microsoft.com/office/powerpoint/2012/main"/>
+    </p:ext>
+  </p:extLst>
 </p:presentation>
 </file>
 
@@ -537,7 +542,7 @@
           <a:p>
             <a:fld id="{C4705B3F-3B1D-4AA2-8C74-87C80A92D7C5}" type="datetimeFigureOut">
               <a:rPr lang="en-DE" smtClean="0"/>
-              <a:t>24 Aug 2026</a:t>
+              <a:t>10/13/2026</a:t>
             </a:fld>
             <a:endParaRPr lang="en-DE"/>
           </a:p>
@@ -696,7 +701,7 @@
           <a:p>
             <a:fld id="{90FB4721-2B7E-4B6C-8B12-AD61EF839228}" type="slidenum">
               <a:rPr lang="en-DE" smtClean="0"/>
-              <a:t>‹#›</a:t>
+              <a:t>‹Nr.›</a:t>
             </a:fld>
             <a:endParaRPr lang="en-DE"/>
           </a:p>
@@ -908,7 +913,7 @@
       </p:grpSpPr>
       <p:sp>
         <p:nvSpPr>
-          <p:cNvPr id="2" name="Slide Image Placeholder 1"/>
+          <p:cNvPr id="2" name="Folienbildplatzhalter 1"/>
           <p:cNvSpPr>
             <a:spLocks noGrp="1" noRot="1" noChangeAspect="1"/>
           </p:cNvSpPr>
@@ -920,7 +925,7 @@
       </p:sp>
       <p:sp>
         <p:nvSpPr>
-          <p:cNvPr id="3" name="Notes Placeholder 2"/>
+          <p:cNvPr id="3" name="Notizenplatzhalter 2"/>
           <p:cNvSpPr>
             <a:spLocks noGrp="1"/>
           </p:cNvSpPr>
@@ -933,13 +938,16 @@
           <a:bodyPr/>
           <a:lstStyle/>
           <a:p>
-            <a:endParaRPr lang="en-DE" dirty="0"/>
+            <a:r>
+              <a:rPr lang="de-DE" dirty="0"/>
+              <a:t>Ich nehme euch mit auf eine Reise, was wir so in unserer Community of Practice bei uns im Unternehmen machen.</a:t>
+            </a:r>
           </a:p>
         </p:txBody>
       </p:sp>
       <p:sp>
         <p:nvSpPr>
-          <p:cNvPr id="4" name="Slide Number Placeholder 3"/>
+          <p:cNvPr id="4" name="Foliennummernplatzhalter 3"/>
           <p:cNvSpPr>
             <a:spLocks noGrp="1"/>
           </p:cNvSpPr>
@@ -954,7 +962,7 @@
           <a:p>
             <a:fld id="{90FB4721-2B7E-4B6C-8B12-AD61EF839228}" type="slidenum">
               <a:rPr lang="en-DE" smtClean="0"/>
-              <a:t>5</a:t>
+              <a:t>2</a:t>
             </a:fld>
             <a:endParaRPr lang="en-DE"/>
           </a:p>
@@ -963,7 +971,7 @@
     </p:spTree>
     <p:extLst>
       <p:ext uri="{BB962C8B-B14F-4D97-AF65-F5344CB8AC3E}">
-        <p14:creationId xmlns:p14="http://schemas.microsoft.com/office/powerpoint/2010/main" val="3318030990"/>
+        <p14:creationId xmlns:p14="http://schemas.microsoft.com/office/powerpoint/2010/main" val="891732874"/>
       </p:ext>
     </p:extLst>
   </p:cSld>
@@ -1017,238 +1025,7 @@
           <a:bodyPr/>
           <a:lstStyle/>
           <a:p>
-            <a:r>
-              <a:rPr lang="en-GB" dirty="0" err="1"/>
-              <a:t>Unterschied</a:t>
-            </a:r>
-            <a:r>
-              <a:rPr lang="en-GB" dirty="0"/>
-              <a:t> </a:t>
-            </a:r>
-            <a:r>
-              <a:rPr lang="en-GB" dirty="0" err="1"/>
-              <a:t>zum</a:t>
-            </a:r>
-            <a:r>
-              <a:rPr lang="en-GB" dirty="0"/>
-              <a:t> Top N Filter auf Visual Ebene </a:t>
-            </a:r>
-            <a:r>
-              <a:rPr lang="en-GB" dirty="0" err="1"/>
-              <a:t>ist</a:t>
-            </a:r>
-            <a:r>
-              <a:rPr lang="en-GB" dirty="0"/>
-              <a:t>, </a:t>
-            </a:r>
-            <a:r>
-              <a:rPr lang="en-GB" dirty="0" err="1"/>
-              <a:t>dass</a:t>
-            </a:r>
-            <a:r>
-              <a:rPr lang="en-GB" dirty="0"/>
-              <a:t> </a:t>
-            </a:r>
-            <a:r>
-              <a:rPr lang="en-GB" dirty="0" err="1"/>
-              <a:t>mit</a:t>
-            </a:r>
-            <a:r>
-              <a:rPr lang="en-GB" dirty="0"/>
-              <a:t> der </a:t>
-            </a:r>
-            <a:r>
-              <a:rPr lang="en-GB" dirty="0" err="1"/>
-              <a:t>Bereechnungsgruppe</a:t>
-            </a:r>
-            <a:r>
-              <a:rPr lang="en-GB" dirty="0"/>
-              <a:t> die Top 5 Kunden </a:t>
-            </a:r>
-            <a:r>
-              <a:rPr lang="en-GB" dirty="0" err="1"/>
-              <a:t>innerhalb</a:t>
-            </a:r>
-            <a:r>
-              <a:rPr lang="en-GB" dirty="0"/>
-              <a:t> </a:t>
-            </a:r>
-            <a:r>
-              <a:rPr lang="en-GB" dirty="0" err="1"/>
-              <a:t>einer</a:t>
-            </a:r>
-            <a:r>
-              <a:rPr lang="en-GB" dirty="0"/>
-              <a:t> </a:t>
-            </a:r>
-            <a:r>
-              <a:rPr lang="en-GB" dirty="0" err="1"/>
-              <a:t>Kategorie</a:t>
-            </a:r>
-            <a:r>
-              <a:rPr lang="en-GB" dirty="0"/>
-              <a:t>, </a:t>
-            </a:r>
-            <a:r>
-              <a:rPr lang="en-GB" dirty="0" err="1"/>
-              <a:t>z.B.</a:t>
-            </a:r>
-            <a:r>
-              <a:rPr lang="en-GB" dirty="0"/>
-              <a:t> Jahr </a:t>
-            </a:r>
-            <a:r>
-              <a:rPr lang="en-GB" dirty="0" err="1"/>
-              <a:t>oder</a:t>
-            </a:r>
-            <a:r>
-              <a:rPr lang="en-GB" dirty="0"/>
-              <a:t> Region </a:t>
-            </a:r>
-            <a:r>
-              <a:rPr lang="en-GB" dirty="0" err="1"/>
-              <a:t>berechnet</a:t>
-            </a:r>
-            <a:r>
-              <a:rPr lang="en-GB" dirty="0"/>
-              <a:t> </a:t>
-            </a:r>
-            <a:r>
-              <a:rPr lang="en-GB" dirty="0" err="1"/>
-              <a:t>werden</a:t>
-            </a:r>
-            <a:r>
-              <a:rPr lang="en-GB" dirty="0"/>
-              <a:t> </a:t>
-            </a:r>
-            <a:r>
-              <a:rPr lang="en-GB" dirty="0" err="1"/>
-              <a:t>können</a:t>
-            </a:r>
-            <a:r>
-              <a:rPr lang="en-GB" dirty="0"/>
-              <a:t>, </a:t>
-            </a:r>
-            <a:r>
-              <a:rPr lang="en-GB" dirty="0" err="1"/>
-              <a:t>wären</a:t>
-            </a:r>
-            <a:r>
-              <a:rPr lang="en-GB" dirty="0"/>
-              <a:t> der Filter auf Visual Ebene 5 Kunden für das </a:t>
-            </a:r>
-            <a:r>
-              <a:rPr lang="en-GB" dirty="0" err="1"/>
-              <a:t>gesamte</a:t>
-            </a:r>
-            <a:r>
-              <a:rPr lang="en-GB" dirty="0"/>
-              <a:t> Visual </a:t>
-            </a:r>
-            <a:r>
-              <a:rPr lang="en-GB" dirty="0" err="1"/>
-              <a:t>auswählt</a:t>
-            </a:r>
-            <a:r>
-              <a:rPr lang="en-GB" dirty="0"/>
-              <a:t>.</a:t>
-            </a:r>
-          </a:p>
-          <a:p>
-            <a:r>
-              <a:rPr lang="en-GB" dirty="0" err="1"/>
-              <a:t>Beispiel</a:t>
-            </a:r>
-            <a:r>
-              <a:rPr lang="en-GB" dirty="0"/>
-              <a:t> In </a:t>
-            </a:r>
-            <a:r>
-              <a:rPr lang="en-GB" b="1" dirty="0"/>
-              <a:t>Contoso 10M.pbix</a:t>
-            </a:r>
-            <a:endParaRPr lang="en-GB" b="0" dirty="0"/>
-          </a:p>
-          <a:p>
-            <a:endParaRPr lang="en-GB" dirty="0"/>
-          </a:p>
-          <a:p>
-            <a:r>
-              <a:rPr lang="en-GB" dirty="0" err="1"/>
-              <a:t>Beispiele</a:t>
-            </a:r>
-            <a:r>
-              <a:rPr lang="en-GB" dirty="0"/>
-              <a:t>:</a:t>
-            </a:r>
-          </a:p>
-          <a:p>
-            <a:pPr marL="228600" indent="-228600">
-              <a:buFont typeface="+mj-lt"/>
-              <a:buAutoNum type="arabicPeriod"/>
-            </a:pPr>
-            <a:r>
-              <a:rPr lang="en-GB" dirty="0"/>
-              <a:t>Top 5 Kunden </a:t>
-            </a:r>
-            <a:r>
-              <a:rPr lang="en-GB" dirty="0" err="1"/>
-              <a:t>nach</a:t>
-            </a:r>
-            <a:r>
-              <a:rPr lang="en-GB" dirty="0"/>
-              <a:t> </a:t>
-            </a:r>
-            <a:r>
-              <a:rPr lang="en-GB" dirty="0" err="1"/>
-              <a:t>Anzahl</a:t>
-            </a:r>
-            <a:r>
-              <a:rPr lang="en-GB" dirty="0"/>
-              <a:t> </a:t>
-            </a:r>
-            <a:r>
-              <a:rPr lang="en-GB" dirty="0" err="1"/>
-              <a:t>Bestellungen</a:t>
-            </a:r>
-            <a:r>
-              <a:rPr lang="en-GB" dirty="0"/>
-              <a:t> → Contoso 10M</a:t>
-            </a:r>
-          </a:p>
-          <a:p>
-            <a:pPr marL="228600" indent="-228600">
-              <a:buFont typeface="+mj-lt"/>
-              <a:buAutoNum type="arabicPeriod"/>
-            </a:pPr>
-            <a:r>
-              <a:rPr lang="en-GB" dirty="0" err="1"/>
-              <a:t>Übungen</a:t>
-            </a:r>
-            <a:r>
-              <a:rPr lang="en-GB" dirty="0"/>
-              <a:t> </a:t>
-            </a:r>
-            <a:r>
-              <a:rPr lang="en-GB" dirty="0" err="1"/>
-              <a:t>aus</a:t>
-            </a:r>
-            <a:r>
-              <a:rPr lang="en-GB" dirty="0"/>
-              <a:t> </a:t>
-            </a:r>
-            <a:r>
-              <a:rPr lang="en-GB" dirty="0" err="1"/>
-              <a:t>Sprechblasen</a:t>
-            </a:r>
-            <a:r>
-              <a:rPr lang="en-GB" dirty="0"/>
-              <a:t> in DIAD Report.</a:t>
-            </a:r>
             <a:endParaRPr lang="en-DE" dirty="0"/>
-          </a:p>
-          <a:p>
-            <a:endParaRPr lang="en-DE" b="1" dirty="0"/>
           </a:p>
         </p:txBody>
       </p:sp>
@@ -1269,7 +1046,7 @@
           <a:p>
             <a:fld id="{90FB4721-2B7E-4B6C-8B12-AD61EF839228}" type="slidenum">
               <a:rPr lang="en-DE" smtClean="0"/>
-              <a:t>6</a:t>
+              <a:t>5</a:t>
             </a:fld>
             <a:endParaRPr lang="en-DE"/>
           </a:p>
@@ -1278,7 +1055,7 @@
     </p:spTree>
     <p:extLst>
       <p:ext uri="{BB962C8B-B14F-4D97-AF65-F5344CB8AC3E}">
-        <p14:creationId xmlns:p14="http://schemas.microsoft.com/office/powerpoint/2010/main" val="2700479654"/>
+        <p14:creationId xmlns:p14="http://schemas.microsoft.com/office/powerpoint/2010/main" val="3318030990"/>
       </p:ext>
     </p:extLst>
   </p:cSld>
@@ -1334,14 +1111,256 @@
           <a:p>
             <a:r>
               <a:rPr lang="en-GB" dirty="0" err="1"/>
+              <a:t>Beispiel</a:t>
+            </a:r>
+            <a:r>
+              <a:rPr lang="en-GB" dirty="0"/>
+              <a:t>: Top N Filter versus Top N </a:t>
+            </a:r>
+            <a:r>
+              <a:rPr lang="en-GB" dirty="0" err="1"/>
+              <a:t>Berechnungsgruppe</a:t>
+            </a:r>
+            <a:endParaRPr lang="en-GB" dirty="0"/>
+          </a:p>
+          <a:p>
+            <a:endParaRPr lang="en-GB" dirty="0"/>
+          </a:p>
+          <a:p>
+            <a:r>
+              <a:rPr lang="en-GB" dirty="0" err="1"/>
+              <a:t>Unterschied</a:t>
+            </a:r>
+            <a:r>
+              <a:rPr lang="en-GB" dirty="0"/>
+              <a:t> </a:t>
+            </a:r>
+            <a:r>
+              <a:rPr lang="en-GB" dirty="0" err="1"/>
+              <a:t>zum</a:t>
+            </a:r>
+            <a:r>
+              <a:rPr lang="en-GB" dirty="0"/>
+              <a:t> Top N Filter auf Visual Ebene </a:t>
+            </a:r>
+            <a:r>
+              <a:rPr lang="en-GB" dirty="0" err="1"/>
+              <a:t>ist</a:t>
+            </a:r>
+            <a:r>
+              <a:rPr lang="en-GB" dirty="0"/>
+              <a:t>, </a:t>
+            </a:r>
+            <a:r>
+              <a:rPr lang="en-GB" dirty="0" err="1"/>
+              <a:t>dass</a:t>
+            </a:r>
+            <a:r>
+              <a:rPr lang="en-GB" dirty="0"/>
+              <a:t> </a:t>
+            </a:r>
+            <a:r>
+              <a:rPr lang="en-GB" dirty="0" err="1"/>
+              <a:t>mit</a:t>
+            </a:r>
+            <a:r>
+              <a:rPr lang="en-GB" dirty="0"/>
+              <a:t> der </a:t>
+            </a:r>
+            <a:r>
+              <a:rPr lang="en-GB" dirty="0" err="1"/>
+              <a:t>Berechnungsgruppe</a:t>
+            </a:r>
+            <a:r>
+              <a:rPr lang="en-GB" dirty="0"/>
+              <a:t> die Top 5 Kunden </a:t>
+            </a:r>
+            <a:r>
+              <a:rPr lang="en-GB" dirty="0" err="1"/>
+              <a:t>innerhalb</a:t>
+            </a:r>
+            <a:r>
+              <a:rPr lang="en-GB" dirty="0"/>
+              <a:t> </a:t>
+            </a:r>
+            <a:r>
+              <a:rPr lang="en-GB" dirty="0" err="1"/>
+              <a:t>einer</a:t>
+            </a:r>
+            <a:r>
+              <a:rPr lang="en-GB" dirty="0"/>
+              <a:t> </a:t>
+            </a:r>
+            <a:r>
+              <a:rPr lang="en-GB" dirty="0" err="1"/>
+              <a:t>Kategorie</a:t>
+            </a:r>
+            <a:r>
+              <a:rPr lang="en-GB" dirty="0"/>
+              <a:t>, </a:t>
+            </a:r>
+            <a:r>
+              <a:rPr lang="en-GB" dirty="0" err="1"/>
+              <a:t>z.B.</a:t>
+            </a:r>
+            <a:r>
+              <a:rPr lang="en-GB" dirty="0"/>
+              <a:t> Jahr </a:t>
+            </a:r>
+            <a:r>
+              <a:rPr lang="en-GB" dirty="0" err="1"/>
+              <a:t>oder</a:t>
+            </a:r>
+            <a:r>
+              <a:rPr lang="en-GB" dirty="0"/>
+              <a:t> Region </a:t>
+            </a:r>
+            <a:r>
+              <a:rPr lang="en-GB" dirty="0" err="1"/>
+              <a:t>berechnet</a:t>
+            </a:r>
+            <a:r>
+              <a:rPr lang="en-GB" dirty="0"/>
+              <a:t> </a:t>
+            </a:r>
+            <a:r>
+              <a:rPr lang="en-GB" dirty="0" err="1"/>
+              <a:t>werden</a:t>
+            </a:r>
+            <a:r>
+              <a:rPr lang="en-GB" dirty="0"/>
+              <a:t> </a:t>
+            </a:r>
+            <a:r>
+              <a:rPr lang="en-GB" dirty="0" err="1"/>
+              <a:t>können</a:t>
+            </a:r>
+            <a:r>
+              <a:rPr lang="en-GB" dirty="0"/>
+              <a:t>, </a:t>
+            </a:r>
+            <a:r>
+              <a:rPr lang="en-GB" dirty="0" err="1"/>
+              <a:t>wären</a:t>
+            </a:r>
+            <a:r>
+              <a:rPr lang="en-GB" dirty="0"/>
+              <a:t> der Filter auf Visual Ebene 5 Kunden für das </a:t>
+            </a:r>
+            <a:r>
+              <a:rPr lang="en-GB" dirty="0" err="1"/>
+              <a:t>gesamte</a:t>
+            </a:r>
+            <a:r>
+              <a:rPr lang="en-GB" dirty="0"/>
+              <a:t> Visual </a:t>
+            </a:r>
+            <a:r>
+              <a:rPr lang="en-GB" dirty="0" err="1"/>
+              <a:t>auswählt</a:t>
+            </a:r>
+            <a:r>
+              <a:rPr lang="en-GB" dirty="0"/>
+              <a:t>.</a:t>
+            </a:r>
+          </a:p>
+          <a:p>
+            <a:r>
+              <a:rPr lang="en-GB" dirty="0" err="1"/>
+              <a:t>Beispiel</a:t>
+            </a:r>
+            <a:r>
+              <a:rPr lang="en-GB" dirty="0"/>
+              <a:t> In </a:t>
+            </a:r>
+            <a:r>
+              <a:rPr lang="en-GB" b="1" dirty="0"/>
+              <a:t>DIAD </a:t>
+            </a:r>
+            <a:r>
+              <a:rPr lang="en-GB" b="1" dirty="0" err="1"/>
+              <a:t>Final.pbix</a:t>
+            </a:r>
+            <a:endParaRPr lang="en-GB" b="0" dirty="0"/>
+          </a:p>
+          <a:p>
+            <a:endParaRPr lang="en-GB" dirty="0"/>
+          </a:p>
+          <a:p>
+            <a:r>
+              <a:rPr lang="en-GB" dirty="0" err="1"/>
               <a:t>Beispiele</a:t>
             </a:r>
             <a:r>
               <a:rPr lang="en-GB" dirty="0"/>
+              <a:t>:</a:t>
+            </a:r>
+          </a:p>
+          <a:p>
+            <a:pPr marL="228600" indent="-228600">
+              <a:buFont typeface="+mj-lt"/>
+              <a:buAutoNum type="arabicPeriod"/>
+            </a:pPr>
+            <a:r>
+              <a:rPr lang="en-GB" dirty="0"/>
+              <a:t>Top 5 Kunden (</a:t>
+            </a:r>
+            <a:r>
+              <a:rPr lang="en-GB" dirty="0" err="1"/>
+              <a:t>bzw</a:t>
+            </a:r>
+            <a:r>
+              <a:rPr lang="en-GB" dirty="0"/>
+              <a:t>. </a:t>
+            </a:r>
+            <a:r>
+              <a:rPr lang="en-GB" dirty="0" err="1"/>
+              <a:t>ZipCountry</a:t>
+            </a:r>
+            <a:r>
+              <a:rPr lang="en-GB" dirty="0"/>
+              <a:t>) </a:t>
+            </a:r>
+            <a:r>
+              <a:rPr lang="en-GB" dirty="0" err="1"/>
+              <a:t>nach</a:t>
+            </a:r>
+            <a:r>
+              <a:rPr lang="en-GB" dirty="0"/>
               <a:t> </a:t>
             </a:r>
             <a:r>
               <a:rPr lang="en-GB" dirty="0" err="1"/>
+              <a:t>Anzahl</a:t>
+            </a:r>
+            <a:r>
+              <a:rPr lang="en-GB" dirty="0"/>
+              <a:t> </a:t>
+            </a:r>
+            <a:r>
+              <a:rPr lang="en-GB" dirty="0" err="1"/>
+              <a:t>Bestellungen</a:t>
+            </a:r>
+            <a:r>
+              <a:rPr lang="en-GB" dirty="0"/>
+              <a:t> → DIAD</a:t>
+            </a:r>
+          </a:p>
+          <a:p>
+            <a:pPr marL="228600" indent="-228600">
+              <a:buFont typeface="+mj-lt"/>
+              <a:buAutoNum type="arabicPeriod"/>
+            </a:pPr>
+            <a:r>
+              <a:rPr lang="en-GB" dirty="0" err="1"/>
+              <a:t>Übungen</a:t>
+            </a:r>
+            <a:r>
+              <a:rPr lang="en-GB" dirty="0"/>
+              <a:t> </a:t>
+            </a:r>
+            <a:r>
+              <a:rPr lang="en-GB" dirty="0" err="1"/>
               <a:t>aus</a:t>
             </a:r>
             <a:r>
@@ -1357,6 +1376,9 @@
               <a:t> in DIAD Report.</a:t>
             </a:r>
             <a:endParaRPr lang="en-DE" dirty="0"/>
+          </a:p>
+          <a:p>
+            <a:endParaRPr lang="en-DE" b="1" dirty="0"/>
           </a:p>
         </p:txBody>
       </p:sp>
@@ -1377,7 +1399,7 @@
           <a:p>
             <a:fld id="{90FB4721-2B7E-4B6C-8B12-AD61EF839228}" type="slidenum">
               <a:rPr lang="en-DE" smtClean="0"/>
-              <a:t>7</a:t>
+              <a:t>6</a:t>
             </a:fld>
             <a:endParaRPr lang="en-DE"/>
           </a:p>
@@ -1386,7 +1408,7 @@
     </p:spTree>
     <p:extLst>
       <p:ext uri="{BB962C8B-B14F-4D97-AF65-F5344CB8AC3E}">
-        <p14:creationId xmlns:p14="http://schemas.microsoft.com/office/powerpoint/2010/main" val="2946616023"/>
+        <p14:creationId xmlns:p14="http://schemas.microsoft.com/office/powerpoint/2010/main" val="2700479654"/>
       </p:ext>
     </p:extLst>
   </p:cSld>
@@ -1441,24 +1463,28 @@
           <a:lstStyle/>
           <a:p>
             <a:r>
-              <a:rPr lang="en-GB" dirty="0"/>
-              <a:t>Hohe Zahl = </a:t>
-            </a:r>
-            <a:r>
-              <a:rPr lang="en-GB" dirty="0" err="1"/>
-              <a:t>hohe</a:t>
-            </a:r>
-            <a:r>
-              <a:rPr lang="en-GB" dirty="0"/>
-              <a:t> Position = </a:t>
-            </a:r>
-            <a:r>
-              <a:rPr lang="en-GB" dirty="0" err="1"/>
-              <a:t>äußeres</a:t>
-            </a:r>
-            <a:r>
-              <a:rPr lang="en-GB" dirty="0"/>
-              <a:t> CALCULATE()</a:t>
+              <a:rPr lang="en-GB" dirty="0" err="1"/>
+              <a:t>Beispiele</a:t>
+            </a:r>
+            <a:r>
+              <a:rPr lang="en-GB" dirty="0"/>
+              <a:t> </a:t>
+            </a:r>
+            <a:r>
+              <a:rPr lang="en-GB" dirty="0" err="1"/>
+              <a:t>aus</a:t>
+            </a:r>
+            <a:r>
+              <a:rPr lang="en-GB" dirty="0"/>
+              <a:t> </a:t>
+            </a:r>
+            <a:r>
+              <a:rPr lang="en-GB" dirty="0" err="1"/>
+              <a:t>Sprechblasen</a:t>
+            </a:r>
+            <a:r>
+              <a:rPr lang="en-GB" dirty="0"/>
+              <a:t> in DIAD Report.</a:t>
             </a:r>
             <a:endParaRPr lang="en-DE" dirty="0"/>
           </a:p>
@@ -1481,7 +1507,7 @@
           <a:p>
             <a:fld id="{90FB4721-2B7E-4B6C-8B12-AD61EF839228}" type="slidenum">
               <a:rPr lang="en-DE" smtClean="0"/>
-              <a:t>8</a:t>
+              <a:t>7</a:t>
             </a:fld>
             <a:endParaRPr lang="en-DE"/>
           </a:p>
@@ -1490,7 +1516,7 @@
     </p:spTree>
     <p:extLst>
       <p:ext uri="{BB962C8B-B14F-4D97-AF65-F5344CB8AC3E}">
-        <p14:creationId xmlns:p14="http://schemas.microsoft.com/office/powerpoint/2010/main" val="3169440513"/>
+        <p14:creationId xmlns:p14="http://schemas.microsoft.com/office/powerpoint/2010/main" val="2946616023"/>
       </p:ext>
     </p:extLst>
   </p:cSld>
@@ -1544,7 +1570,171 @@
           <a:bodyPr/>
           <a:lstStyle/>
           <a:p>
-            <a:endParaRPr lang="en-DE" dirty="0"/>
+            <a:r>
+              <a:rPr lang="en-GB" dirty="0"/>
+              <a:t>Hohe Zahl = </a:t>
+            </a:r>
+            <a:r>
+              <a:rPr lang="en-GB" dirty="0" err="1"/>
+              <a:t>hohe</a:t>
+            </a:r>
+            <a:r>
+              <a:rPr lang="en-GB" dirty="0"/>
+              <a:t> Position = </a:t>
+            </a:r>
+            <a:r>
+              <a:rPr lang="en-GB" dirty="0" err="1"/>
+              <a:t>äußeres</a:t>
+            </a:r>
+            <a:r>
+              <a:rPr lang="en-GB" dirty="0"/>
+              <a:t> CALCULATE()</a:t>
+            </a:r>
+          </a:p>
+          <a:p>
+            <a:endParaRPr lang="en-GB" dirty="0"/>
+          </a:p>
+          <a:p>
+            <a:r>
+              <a:rPr lang="en-GB" i="1" dirty="0" err="1"/>
+              <a:t>Zuerst</a:t>
+            </a:r>
+            <a:r>
+              <a:rPr lang="en-GB" i="1" dirty="0"/>
+              <a:t> </a:t>
+            </a:r>
+            <a:r>
+              <a:rPr lang="en-GB" i="1" dirty="0" err="1"/>
+              <a:t>Teilnehmer</a:t>
+            </a:r>
+            <a:r>
+              <a:rPr lang="en-GB" i="1" dirty="0"/>
+              <a:t> </a:t>
+            </a:r>
+            <a:r>
+              <a:rPr lang="en-GB" i="1" dirty="0" err="1"/>
+              <a:t>fragen</a:t>
+            </a:r>
+            <a:r>
+              <a:rPr lang="en-GB" i="1" dirty="0"/>
+              <a:t>, was dieses </a:t>
+            </a:r>
+            <a:r>
+              <a:rPr lang="en-GB" i="1" dirty="0" err="1"/>
+              <a:t>Beispiel</a:t>
+            </a:r>
+            <a:r>
+              <a:rPr lang="en-GB" i="1" dirty="0"/>
+              <a:t> </a:t>
+            </a:r>
+            <a:r>
+              <a:rPr lang="en-GB" i="1" dirty="0" err="1"/>
+              <a:t>berechnet</a:t>
+            </a:r>
+            <a:r>
+              <a:rPr lang="en-GB" i="1" dirty="0"/>
+              <a:t>.</a:t>
+            </a:r>
+          </a:p>
+          <a:p>
+            <a:r>
+              <a:rPr lang="en-GB" dirty="0"/>
+              <a:t>Dieses </a:t>
+            </a:r>
+            <a:r>
+              <a:rPr lang="en-GB" dirty="0" err="1"/>
+              <a:t>Beispiel</a:t>
+            </a:r>
+            <a:r>
+              <a:rPr lang="en-GB" dirty="0"/>
+              <a:t> </a:t>
+            </a:r>
+            <a:r>
+              <a:rPr lang="en-GB" dirty="0" err="1"/>
+              <a:t>berechnet</a:t>
+            </a:r>
+            <a:r>
+              <a:rPr lang="en-GB" dirty="0"/>
+              <a:t> die </a:t>
+            </a:r>
+            <a:r>
+              <a:rPr lang="en-GB" dirty="0" err="1"/>
+              <a:t>Umsatzentwicklung</a:t>
+            </a:r>
+            <a:r>
+              <a:rPr lang="en-GB" dirty="0"/>
+              <a:t> der </a:t>
+            </a:r>
+            <a:r>
+              <a:rPr lang="en-GB" dirty="0" err="1"/>
+              <a:t>heutigen</a:t>
+            </a:r>
+            <a:r>
+              <a:rPr lang="en-GB" dirty="0"/>
+              <a:t> </a:t>
+            </a:r>
+            <a:r>
+              <a:rPr lang="en-GB" dirty="0" err="1"/>
+              <a:t>TopN</a:t>
+            </a:r>
+            <a:r>
+              <a:rPr lang="en-GB" dirty="0"/>
+              <a:t> Kunden,</a:t>
+            </a:r>
+          </a:p>
+          <a:p>
+            <a:r>
+              <a:rPr lang="en-GB" dirty="0"/>
+              <a:t>nicht den </a:t>
+            </a:r>
+            <a:r>
+              <a:rPr lang="en-GB" dirty="0" err="1"/>
+              <a:t>Unterschied</a:t>
+            </a:r>
+            <a:r>
+              <a:rPr lang="en-GB" dirty="0"/>
+              <a:t> </a:t>
+            </a:r>
+            <a:r>
+              <a:rPr lang="en-GB" dirty="0" err="1"/>
+              <a:t>zwischen</a:t>
+            </a:r>
+            <a:r>
+              <a:rPr lang="en-GB" dirty="0"/>
+              <a:t> den </a:t>
+            </a:r>
+            <a:r>
+              <a:rPr lang="en-GB" dirty="0" err="1"/>
+              <a:t>TopN</a:t>
+            </a:r>
+            <a:r>
+              <a:rPr lang="en-GB" dirty="0"/>
+              <a:t> Kunden von </a:t>
+            </a:r>
+            <a:r>
+              <a:rPr lang="en-GB" dirty="0" err="1"/>
+              <a:t>heute</a:t>
+            </a:r>
+            <a:r>
+              <a:rPr lang="en-GB" dirty="0"/>
+              <a:t> und den </a:t>
+            </a:r>
+            <a:r>
+              <a:rPr lang="en-GB" dirty="0" err="1"/>
+              <a:t>TopN</a:t>
+            </a:r>
+            <a:r>
+              <a:rPr lang="en-GB" dirty="0"/>
+              <a:t> Kunden von </a:t>
+            </a:r>
+            <a:r>
+              <a:rPr lang="en-GB" dirty="0" err="1"/>
+              <a:t>letztem</a:t>
+            </a:r>
+            <a:r>
+              <a:rPr lang="en-GB" dirty="0"/>
+              <a:t> Jahr.</a:t>
+            </a:r>
           </a:p>
         </p:txBody>
       </p:sp>
@@ -1565,6 +1755,134 @@
           <a:p>
             <a:fld id="{90FB4721-2B7E-4B6C-8B12-AD61EF839228}" type="slidenum">
               <a:rPr lang="en-DE" smtClean="0"/>
+              <a:t>8</a:t>
+            </a:fld>
+            <a:endParaRPr lang="en-DE"/>
+          </a:p>
+        </p:txBody>
+      </p:sp>
+    </p:spTree>
+    <p:extLst>
+      <p:ext uri="{BB962C8B-B14F-4D97-AF65-F5344CB8AC3E}">
+        <p14:creationId xmlns:p14="http://schemas.microsoft.com/office/powerpoint/2010/main" val="3169440513"/>
+      </p:ext>
+    </p:extLst>
+  </p:cSld>
+  <p:clrMapOvr>
+    <a:masterClrMapping/>
+  </p:clrMapOvr>
+</p:notes>
+</file>
+
+<file path=ppt/notesSlides/notesSlide7.xml><?xml version="1.0" encoding="utf-8"?>
+<p:notes xmlns:a="http://schemas.openxmlformats.org/drawingml/2006/main" xmlns:r="http://schemas.openxmlformats.org/officeDocument/2006/relationships" xmlns:p="http://schemas.openxmlformats.org/presentationml/2006/main">
+  <p:cSld>
+    <p:spTree>
+      <p:nvGrpSpPr>
+        <p:cNvPr id="1" name=""/>
+        <p:cNvGrpSpPr/>
+        <p:nvPr/>
+      </p:nvGrpSpPr>
+      <p:grpSpPr>
+        <a:xfrm>
+          <a:off x="0" y="0"/>
+          <a:ext cx="0" cy="0"/>
+          <a:chOff x="0" y="0"/>
+          <a:chExt cx="0" cy="0"/>
+        </a:xfrm>
+      </p:grpSpPr>
+      <p:sp>
+        <p:nvSpPr>
+          <p:cNvPr id="2" name="Slide Image Placeholder 1"/>
+          <p:cNvSpPr>
+            <a:spLocks noGrp="1" noRot="1" noChangeAspect="1"/>
+          </p:cNvSpPr>
+          <p:nvPr>
+            <p:ph type="sldImg"/>
+          </p:nvPr>
+        </p:nvSpPr>
+        <p:spPr/>
+      </p:sp>
+      <p:sp>
+        <p:nvSpPr>
+          <p:cNvPr id="3" name="Notes Placeholder 2"/>
+          <p:cNvSpPr>
+            <a:spLocks noGrp="1"/>
+          </p:cNvSpPr>
+          <p:nvPr>
+            <p:ph type="body" idx="1"/>
+          </p:nvPr>
+        </p:nvSpPr>
+        <p:spPr/>
+        <p:txBody>
+          <a:bodyPr/>
+          <a:lstStyle/>
+          <a:p>
+            <a:r>
+              <a:rPr lang="de-DE" dirty="0"/>
+              <a:t>Beispiel: </a:t>
+            </a:r>
+            <a:r>
+              <a:rPr lang="de-DE" dirty="0" err="1"/>
+              <a:t>TopN</a:t>
+            </a:r>
+            <a:r>
+              <a:rPr lang="de-DE" dirty="0"/>
+              <a:t> Filter</a:t>
+            </a:r>
+          </a:p>
+          <a:p>
+            <a:r>
+              <a:rPr lang="de-DE" dirty="0"/>
+              <a:t>Beispiele Namenskonventionen:</a:t>
+            </a:r>
+          </a:p>
+          <a:p>
+            <a:r>
+              <a:rPr lang="de-DE" dirty="0"/>
+              <a:t>TOPNFILTER → wie eingebaute Funktion</a:t>
+            </a:r>
+          </a:p>
+          <a:p>
+            <a:r>
+              <a:rPr lang="de-DE" dirty="0" err="1"/>
+              <a:t>fTopnfilter</a:t>
+            </a:r>
+            <a:r>
+              <a:rPr lang="de-DE" dirty="0"/>
+              <a:t> → alle eigenen Funktionen mit f beginnen</a:t>
+            </a:r>
+          </a:p>
+          <a:p>
+            <a:r>
+              <a:rPr lang="de-DE" dirty="0" err="1"/>
+              <a:t>Local.TopNFilter</a:t>
+            </a:r>
+            <a:r>
+              <a:rPr lang="de-DE" dirty="0"/>
+              <a:t> → Namespaces mit . Besonders, wenn Bibliotheken verwendet werden sollen, wie daxlib.org </a:t>
+            </a:r>
+            <a:endParaRPr lang="en-DE" dirty="0"/>
+          </a:p>
+        </p:txBody>
+      </p:sp>
+      <p:sp>
+        <p:nvSpPr>
+          <p:cNvPr id="4" name="Slide Number Placeholder 3"/>
+          <p:cNvSpPr>
+            <a:spLocks noGrp="1"/>
+          </p:cNvSpPr>
+          <p:nvPr>
+            <p:ph type="sldNum" sz="quarter" idx="5"/>
+          </p:nvPr>
+        </p:nvSpPr>
+        <p:spPr/>
+        <p:txBody>
+          <a:bodyPr/>
+          <a:lstStyle/>
+          <a:p>
+            <a:fld id="{90FB4721-2B7E-4B6C-8B12-AD61EF839228}" type="slidenum">
+              <a:rPr lang="en-DE" smtClean="0"/>
               <a:t>9</a:t>
             </a:fld>
             <a:endParaRPr lang="en-DE"/>
@@ -1584,7 +1902,125 @@
 </p:notes>
 </file>
 
-<file path=ppt/notesSlides/notesSlide7.xml><?xml version="1.0" encoding="utf-8"?>
+<file path=ppt/notesSlides/notesSlide8.xml><?xml version="1.0" encoding="utf-8"?>
+<p:notes xmlns:a="http://schemas.openxmlformats.org/drawingml/2006/main" xmlns:r="http://schemas.openxmlformats.org/officeDocument/2006/relationships" xmlns:p="http://schemas.openxmlformats.org/presentationml/2006/main">
+  <p:cSld>
+    <p:spTree>
+      <p:nvGrpSpPr>
+        <p:cNvPr id="1" name=""/>
+        <p:cNvGrpSpPr/>
+        <p:nvPr/>
+      </p:nvGrpSpPr>
+      <p:grpSpPr>
+        <a:xfrm>
+          <a:off x="0" y="0"/>
+          <a:ext cx="0" cy="0"/>
+          <a:chOff x="0" y="0"/>
+          <a:chExt cx="0" cy="0"/>
+        </a:xfrm>
+      </p:grpSpPr>
+      <p:sp>
+        <p:nvSpPr>
+          <p:cNvPr id="2" name="Folienbildplatzhalter 1"/>
+          <p:cNvSpPr>
+            <a:spLocks noGrp="1" noRot="1" noChangeAspect="1"/>
+          </p:cNvSpPr>
+          <p:nvPr>
+            <p:ph type="sldImg"/>
+          </p:nvPr>
+        </p:nvSpPr>
+        <p:spPr/>
+      </p:sp>
+      <p:sp>
+        <p:nvSpPr>
+          <p:cNvPr id="3" name="Notizenplatzhalter 2"/>
+          <p:cNvSpPr>
+            <a:spLocks noGrp="1"/>
+          </p:cNvSpPr>
+          <p:nvPr>
+            <p:ph type="body" idx="1"/>
+          </p:nvPr>
+        </p:nvSpPr>
+        <p:spPr/>
+        <p:txBody>
+          <a:bodyPr/>
+          <a:lstStyle/>
+          <a:p>
+            <a:r>
+              <a:rPr lang="de-DE" dirty="0"/>
+              <a:t>Was ist universeller?</a:t>
+            </a:r>
+          </a:p>
+          <a:p>
+            <a:r>
+              <a:rPr lang="de-DE" dirty="0"/>
+              <a:t>Was ist verständlicher?</a:t>
+            </a:r>
+          </a:p>
+          <a:p>
+            <a:r>
+              <a:rPr lang="de-DE" dirty="0"/>
+              <a:t>Was ist wartbarer?</a:t>
+            </a:r>
+            <a:br>
+              <a:rPr lang="de-DE" dirty="0"/>
+            </a:br>
+            <a:r>
+              <a:rPr lang="de-DE" dirty="0" err="1"/>
+              <a:t>Was</a:t>
+            </a:r>
+            <a:r>
+              <a:rPr lang="de-DE" dirty="0"/>
+              <a:t> ist das kleinste Übel? → Mit </a:t>
+            </a:r>
+            <a:r>
+              <a:rPr lang="de-DE"/>
+              <a:t>DAX Studio </a:t>
+            </a:r>
+            <a:r>
+              <a:rPr lang="de-DE" dirty="0"/>
+              <a:t>messen!</a:t>
+            </a:r>
+          </a:p>
+        </p:txBody>
+      </p:sp>
+      <p:sp>
+        <p:nvSpPr>
+          <p:cNvPr id="4" name="Foliennummernplatzhalter 3"/>
+          <p:cNvSpPr>
+            <a:spLocks noGrp="1"/>
+          </p:cNvSpPr>
+          <p:nvPr>
+            <p:ph type="sldNum" sz="quarter" idx="5"/>
+          </p:nvPr>
+        </p:nvSpPr>
+        <p:spPr/>
+        <p:txBody>
+          <a:bodyPr/>
+          <a:lstStyle/>
+          <a:p>
+            <a:fld id="{90FB4721-2B7E-4B6C-8B12-AD61EF839228}" type="slidenum">
+              <a:rPr lang="en-DE" smtClean="0"/>
+              <a:t>11</a:t>
+            </a:fld>
+            <a:endParaRPr lang="en-DE"/>
+          </a:p>
+        </p:txBody>
+      </p:sp>
+    </p:spTree>
+    <p:extLst>
+      <p:ext uri="{BB962C8B-B14F-4D97-AF65-F5344CB8AC3E}">
+        <p14:creationId xmlns:p14="http://schemas.microsoft.com/office/powerpoint/2010/main" val="1231197001"/>
+      </p:ext>
+    </p:extLst>
+  </p:cSld>
+  <p:clrMapOvr>
+    <a:masterClrMapping/>
+  </p:clrMapOvr>
+</p:notes>
+</file>
+
+<file path=ppt/notesSlides/notesSlide9.xml><?xml version="1.0" encoding="utf-8"?>
 <p:notes xmlns:a="http://schemas.openxmlformats.org/drawingml/2006/main" xmlns:r="http://schemas.openxmlformats.org/officeDocument/2006/relationships" xmlns:p="http://schemas.openxmlformats.org/presentationml/2006/main">
   <p:cSld>
     <p:spTree>
@@ -1821,7 +2257,7 @@
           <a:p>
             <a:fld id="{0753CDA8-8D66-4362-A217-DC01E15BEB50}" type="datetimeFigureOut">
               <a:rPr lang="en-DE" smtClean="0"/>
-              <a:t>24 Aug 2026</a:t>
+              <a:t>10/13/2026</a:t>
             </a:fld>
             <a:endParaRPr lang="en-DE"/>
           </a:p>
@@ -1875,7 +2311,7 @@
           <a:p>
             <a:fld id="{07E8A7BD-A02B-4A7E-8D43-2DFB3C16E551}" type="slidenum">
               <a:rPr lang="en-DE" smtClean="0"/>
-              <a:t>‹#›</a:t>
+              <a:t>‹Nr.›</a:t>
             </a:fld>
             <a:endParaRPr lang="en-DE"/>
           </a:p>
@@ -2021,7 +2457,7 @@
           <a:p>
             <a:fld id="{0753CDA8-8D66-4362-A217-DC01E15BEB50}" type="datetimeFigureOut">
               <a:rPr lang="en-DE" smtClean="0"/>
-              <a:t>24 Aug 2026</a:t>
+              <a:t>10/13/2026</a:t>
             </a:fld>
             <a:endParaRPr lang="en-DE"/>
           </a:p>
@@ -2075,7 +2511,7 @@
           <a:p>
             <a:fld id="{07E8A7BD-A02B-4A7E-8D43-2DFB3C16E551}" type="slidenum">
               <a:rPr lang="en-DE" smtClean="0"/>
-              <a:t>‹#›</a:t>
+              <a:t>‹Nr.›</a:t>
             </a:fld>
             <a:endParaRPr lang="en-DE"/>
           </a:p>
@@ -2231,7 +2667,7 @@
           <a:p>
             <a:fld id="{0753CDA8-8D66-4362-A217-DC01E15BEB50}" type="datetimeFigureOut">
               <a:rPr lang="en-DE" smtClean="0"/>
-              <a:t>24 Aug 2026</a:t>
+              <a:t>10/13/2026</a:t>
             </a:fld>
             <a:endParaRPr lang="en-DE"/>
           </a:p>
@@ -2285,7 +2721,7 @@
           <a:p>
             <a:fld id="{07E8A7BD-A02B-4A7E-8D43-2DFB3C16E551}" type="slidenum">
               <a:rPr lang="en-DE" smtClean="0"/>
-              <a:t>‹#›</a:t>
+              <a:t>‹Nr.›</a:t>
             </a:fld>
             <a:endParaRPr lang="en-DE"/>
           </a:p>
@@ -2431,7 +2867,7 @@
           <a:p>
             <a:fld id="{0753CDA8-8D66-4362-A217-DC01E15BEB50}" type="datetimeFigureOut">
               <a:rPr lang="en-DE" smtClean="0"/>
-              <a:t>24 Aug 2026</a:t>
+              <a:t>10/13/2026</a:t>
             </a:fld>
             <a:endParaRPr lang="en-DE"/>
           </a:p>
@@ -2485,7 +2921,7 @@
           <a:p>
             <a:fld id="{07E8A7BD-A02B-4A7E-8D43-2DFB3C16E551}" type="slidenum">
               <a:rPr lang="en-DE" smtClean="0"/>
-              <a:t>‹#›</a:t>
+              <a:t>‹Nr.›</a:t>
             </a:fld>
             <a:endParaRPr lang="en-DE"/>
           </a:p>
@@ -2707,7 +3143,7 @@
           <a:p>
             <a:fld id="{0753CDA8-8D66-4362-A217-DC01E15BEB50}" type="datetimeFigureOut">
               <a:rPr lang="en-DE" smtClean="0"/>
-              <a:t>24 Aug 2026</a:t>
+              <a:t>10/13/2026</a:t>
             </a:fld>
             <a:endParaRPr lang="en-DE"/>
           </a:p>
@@ -2761,7 +3197,7 @@
           <a:p>
             <a:fld id="{07E8A7BD-A02B-4A7E-8D43-2DFB3C16E551}" type="slidenum">
               <a:rPr lang="en-DE" smtClean="0"/>
-              <a:t>‹#›</a:t>
+              <a:t>‹Nr.›</a:t>
             </a:fld>
             <a:endParaRPr lang="en-DE"/>
           </a:p>
@@ -2975,7 +3411,7 @@
           <a:p>
             <a:fld id="{0753CDA8-8D66-4362-A217-DC01E15BEB50}" type="datetimeFigureOut">
               <a:rPr lang="en-DE" smtClean="0"/>
-              <a:t>24 Aug 2026</a:t>
+              <a:t>10/13/2026</a:t>
             </a:fld>
             <a:endParaRPr lang="en-DE"/>
           </a:p>
@@ -3029,7 +3465,7 @@
           <a:p>
             <a:fld id="{07E8A7BD-A02B-4A7E-8D43-2DFB3C16E551}" type="slidenum">
               <a:rPr lang="en-DE" smtClean="0"/>
-              <a:t>‹#›</a:t>
+              <a:t>‹Nr.›</a:t>
             </a:fld>
             <a:endParaRPr lang="en-DE"/>
           </a:p>
@@ -3390,7 +3826,7 @@
           <a:p>
             <a:fld id="{0753CDA8-8D66-4362-A217-DC01E15BEB50}" type="datetimeFigureOut">
               <a:rPr lang="en-DE" smtClean="0"/>
-              <a:t>24 Aug 2026</a:t>
+              <a:t>10/13/2026</a:t>
             </a:fld>
             <a:endParaRPr lang="en-DE"/>
           </a:p>
@@ -3444,7 +3880,7 @@
           <a:p>
             <a:fld id="{07E8A7BD-A02B-4A7E-8D43-2DFB3C16E551}" type="slidenum">
               <a:rPr lang="en-DE" smtClean="0"/>
-              <a:t>‹#›</a:t>
+              <a:t>‹Nr.›</a:t>
             </a:fld>
             <a:endParaRPr lang="en-DE"/>
           </a:p>
@@ -3532,7 +3968,7 @@
           <a:p>
             <a:fld id="{0753CDA8-8D66-4362-A217-DC01E15BEB50}" type="datetimeFigureOut">
               <a:rPr lang="en-DE" smtClean="0"/>
-              <a:t>24 Aug 2026</a:t>
+              <a:t>10/13/2026</a:t>
             </a:fld>
             <a:endParaRPr lang="en-DE"/>
           </a:p>
@@ -3586,7 +4022,7 @@
           <a:p>
             <a:fld id="{07E8A7BD-A02B-4A7E-8D43-2DFB3C16E551}" type="slidenum">
               <a:rPr lang="en-DE" smtClean="0"/>
-              <a:t>‹#›</a:t>
+              <a:t>‹Nr.›</a:t>
             </a:fld>
             <a:endParaRPr lang="en-DE"/>
           </a:p>
@@ -3645,7 +4081,7 @@
           <a:p>
             <a:fld id="{0753CDA8-8D66-4362-A217-DC01E15BEB50}" type="datetimeFigureOut">
               <a:rPr lang="en-DE" smtClean="0"/>
-              <a:t>24 Aug 2026</a:t>
+              <a:t>10/13/2026</a:t>
             </a:fld>
             <a:endParaRPr lang="en-DE"/>
           </a:p>
@@ -3699,7 +4135,7 @@
           <a:p>
             <a:fld id="{07E8A7BD-A02B-4A7E-8D43-2DFB3C16E551}" type="slidenum">
               <a:rPr lang="en-DE" smtClean="0"/>
-              <a:t>‹#›</a:t>
+              <a:t>‹Nr.›</a:t>
             </a:fld>
             <a:endParaRPr lang="en-DE"/>
           </a:p>
@@ -3958,7 +4394,7 @@
           <a:p>
             <a:fld id="{0753CDA8-8D66-4362-A217-DC01E15BEB50}" type="datetimeFigureOut">
               <a:rPr lang="en-DE" smtClean="0"/>
-              <a:t>24 Aug 2026</a:t>
+              <a:t>10/13/2026</a:t>
             </a:fld>
             <a:endParaRPr lang="en-DE"/>
           </a:p>
@@ -4012,7 +4448,7 @@
           <a:p>
             <a:fld id="{07E8A7BD-A02B-4A7E-8D43-2DFB3C16E551}" type="slidenum">
               <a:rPr lang="en-DE" smtClean="0"/>
-              <a:t>‹#›</a:t>
+              <a:t>‹Nr.›</a:t>
             </a:fld>
             <a:endParaRPr lang="en-DE"/>
           </a:p>
@@ -4247,7 +4683,7 @@
           <a:p>
             <a:fld id="{0753CDA8-8D66-4362-A217-DC01E15BEB50}" type="datetimeFigureOut">
               <a:rPr lang="en-DE" smtClean="0"/>
-              <a:t>24 Aug 2026</a:t>
+              <a:t>10/13/2026</a:t>
             </a:fld>
             <a:endParaRPr lang="en-DE"/>
           </a:p>
@@ -4301,7 +4737,7 @@
           <a:p>
             <a:fld id="{07E8A7BD-A02B-4A7E-8D43-2DFB3C16E551}" type="slidenum">
               <a:rPr lang="en-DE" smtClean="0"/>
-              <a:t>‹#›</a:t>
+              <a:t>‹Nr.›</a:t>
             </a:fld>
             <a:endParaRPr lang="en-DE"/>
           </a:p>
@@ -4490,7 +4926,7 @@
           <a:p>
             <a:fld id="{0753CDA8-8D66-4362-A217-DC01E15BEB50}" type="datetimeFigureOut">
               <a:rPr lang="en-DE" smtClean="0"/>
-              <a:t>24 Aug 2026</a:t>
+              <a:t>10/13/2026</a:t>
             </a:fld>
             <a:endParaRPr lang="en-DE"/>
           </a:p>
@@ -4580,7 +5016,7 @@
           <a:p>
             <a:fld id="{07E8A7BD-A02B-4A7E-8D43-2DFB3C16E551}" type="slidenum">
               <a:rPr lang="en-DE" smtClean="0"/>
-              <a:t>‹#›</a:t>
+              <a:t>‹Nr.›</a:t>
             </a:fld>
             <a:endParaRPr lang="en-DE"/>
           </a:p>
@@ -11956,7 +12392,7 @@
         <p:spPr>
           <a:xfrm>
             <a:off x="838199" y="1825625"/>
-            <a:ext cx="10906957" cy="4351338"/>
+            <a:ext cx="10906957" cy="4949248"/>
           </a:xfrm>
         </p:spPr>
         <p:txBody>
@@ -12002,6 +12438,14 @@
               <a:rPr lang="de-DE" noProof="0" dirty="0"/>
               <a:t>Text-Measures ignorieren den Format-String der Berechnungsgruppe</a:t>
             </a:r>
+          </a:p>
+          <a:p>
+            <a:pPr lvl="1"/>
+            <a:r>
+              <a:rPr lang="de-DE" dirty="0"/>
+              <a:t>Ggf. dynamischen Format-String implementieren</a:t>
+            </a:r>
+            <a:endParaRPr lang="de-DE" noProof="0" dirty="0"/>
           </a:p>
           <a:p>
             <a:r>
